--- a/research methods/term project - review article/slides/Explainable Identification of Human vs. LLM-Generated Text.pptx
+++ b/research methods/term project - review article/slides/Explainable Identification of Human vs. LLM-Generated Text.pptx
@@ -1806,6 +1806,18 @@
   <p:clrMapOvr>
     <a:masterClrMapping/>
   </p:clrMapOvr>
+  <mc:AlternateContent xmlns:mc="http://schemas.openxmlformats.org/markup-compatibility/2006">
+    <mc:Choice xmlns:p159="http://schemas.microsoft.com/office/powerpoint/2015/09/main" Requires="p159">
+      <p:transition spd="med">
+        <p159:morph option="byObject"/>
+      </p:transition>
+    </mc:Choice>
+    <mc:Fallback>
+      <p:transition spd="med">
+        <p:fade/>
+      </p:transition>
+    </mc:Fallback>
+  </mc:AlternateContent>
 </p:sldLayout>
 </file>
 
@@ -1839,6 +1851,18 @@
   <p:clrMapOvr>
     <a:masterClrMapping/>
   </p:clrMapOvr>
+  <mc:AlternateContent xmlns:mc="http://schemas.openxmlformats.org/markup-compatibility/2006">
+    <mc:Choice xmlns:p159="http://schemas.microsoft.com/office/powerpoint/2015/09/main" Requires="p159">
+      <p:transition spd="med">
+        <p159:morph option="byObject"/>
+      </p:transition>
+    </mc:Choice>
+    <mc:Fallback>
+      <p:transition spd="med">
+        <p:fade/>
+      </p:transition>
+    </mc:Fallback>
+  </mc:AlternateContent>
 </p:sldLayout>
 </file>
 
@@ -1871,6 +1895,18 @@
     <p:sldLayoutId id="2147483649" r:id="rId1"/>
     <p:sldLayoutId id="2147483650" r:id="rId2"/>
   </p:sldLayoutIdLst>
+  <mc:AlternateContent xmlns:mc="http://schemas.openxmlformats.org/markup-compatibility/2006">
+    <mc:Choice xmlns:p159="http://schemas.microsoft.com/office/powerpoint/2015/09/main" Requires="p159">
+      <p:transition spd="med">
+        <p159:morph option="byObject"/>
+      </p:transition>
+    </mc:Choice>
+    <mc:Fallback>
+      <p:transition spd="med">
+        <p:fade/>
+      </p:transition>
+    </mc:Fallback>
+  </mc:AlternateContent>
   <p:hf sldNum="0" hdr="0" ftr="0" dt="0"/>
   <p:txStyles>
     <p:titleStyle>
@@ -2472,9 +2508,18 @@
   <p:clrMapOvr>
     <a:masterClrMapping/>
   </p:clrMapOvr>
-  <p:transition>
-    <p:fade/>
-  </p:transition>
+  <mc:AlternateContent xmlns:mc="http://schemas.openxmlformats.org/markup-compatibility/2006">
+    <mc:Choice xmlns:p159="http://schemas.microsoft.com/office/powerpoint/2015/09/main" Requires="p159">
+      <p:transition spd="med">
+        <p159:morph option="byObject"/>
+      </p:transition>
+    </mc:Choice>
+    <mc:Fallback>
+      <p:transition spd="med">
+        <p:fade/>
+      </p:transition>
+    </mc:Fallback>
+  </mc:AlternateContent>
 </p:sld>
 </file>
 
@@ -3861,9 +3906,18 @@
   <p:clrMapOvr>
     <a:masterClrMapping/>
   </p:clrMapOvr>
-  <p:transition>
-    <p:fade/>
-  </p:transition>
+  <mc:AlternateContent xmlns:mc="http://schemas.openxmlformats.org/markup-compatibility/2006">
+    <mc:Choice xmlns:p159="http://schemas.microsoft.com/office/powerpoint/2015/09/main" Requires="p159">
+      <p:transition spd="med">
+        <p159:morph option="byObject"/>
+      </p:transition>
+    </mc:Choice>
+    <mc:Fallback>
+      <p:transition spd="med">
+        <p:fade/>
+      </p:transition>
+    </mc:Fallback>
+  </mc:AlternateContent>
 </p:sld>
 </file>
 
@@ -4448,9 +4502,18 @@
   <p:clrMapOvr>
     <a:masterClrMapping/>
   </p:clrMapOvr>
-  <p:transition>
-    <p:fade/>
-  </p:transition>
+  <mc:AlternateContent xmlns:mc="http://schemas.openxmlformats.org/markup-compatibility/2006">
+    <mc:Choice xmlns:p159="http://schemas.microsoft.com/office/powerpoint/2015/09/main" Requires="p159">
+      <p:transition spd="med">
+        <p159:morph option="byObject"/>
+      </p:transition>
+    </mc:Choice>
+    <mc:Fallback>
+      <p:transition spd="med">
+        <p:fade/>
+      </p:transition>
+    </mc:Fallback>
+  </mc:AlternateContent>
 </p:sld>
 </file>
 
@@ -5947,9 +6010,18 @@
   <p:clrMapOvr>
     <a:masterClrMapping/>
   </p:clrMapOvr>
-  <p:transition>
-    <p:fade/>
-  </p:transition>
+  <mc:AlternateContent xmlns:mc="http://schemas.openxmlformats.org/markup-compatibility/2006">
+    <mc:Choice xmlns:p159="http://schemas.microsoft.com/office/powerpoint/2015/09/main" Requires="p159">
+      <p:transition spd="med">
+        <p159:morph option="byObject"/>
+      </p:transition>
+    </mc:Choice>
+    <mc:Fallback>
+      <p:transition spd="med">
+        <p:fade/>
+      </p:transition>
+    </mc:Fallback>
+  </mc:AlternateContent>
 </p:sld>
 </file>
 
@@ -6534,9 +6606,18 @@
   <p:clrMapOvr>
     <a:masterClrMapping/>
   </p:clrMapOvr>
-  <p:transition>
-    <p:fade/>
-  </p:transition>
+  <mc:AlternateContent xmlns:mc="http://schemas.openxmlformats.org/markup-compatibility/2006">
+    <mc:Choice xmlns:p159="http://schemas.microsoft.com/office/powerpoint/2015/09/main" Requires="p159">
+      <p:transition spd="med">
+        <p159:morph option="byObject"/>
+      </p:transition>
+    </mc:Choice>
+    <mc:Fallback>
+      <p:transition spd="med">
+        <p:fade/>
+      </p:transition>
+    </mc:Fallback>
+  </mc:AlternateContent>
 </p:sld>
 </file>
 
@@ -7682,9 +7763,18 @@
   <p:clrMapOvr>
     <a:masterClrMapping/>
   </p:clrMapOvr>
-  <p:transition>
-    <p:fade/>
-  </p:transition>
+  <mc:AlternateContent xmlns:mc="http://schemas.openxmlformats.org/markup-compatibility/2006">
+    <mc:Choice xmlns:p159="http://schemas.microsoft.com/office/powerpoint/2015/09/main" Requires="p159">
+      <p:transition spd="med">
+        <p159:morph option="byObject"/>
+      </p:transition>
+    </mc:Choice>
+    <mc:Fallback>
+      <p:transition spd="med">
+        <p:fade/>
+      </p:transition>
+    </mc:Fallback>
+  </mc:AlternateContent>
 </p:sld>
 </file>
 
@@ -9973,9 +10063,18 @@
   <p:clrMapOvr>
     <a:masterClrMapping/>
   </p:clrMapOvr>
-  <p:transition>
-    <p:fade/>
-  </p:transition>
+  <mc:AlternateContent xmlns:mc="http://schemas.openxmlformats.org/markup-compatibility/2006">
+    <mc:Choice xmlns:p159="http://schemas.microsoft.com/office/powerpoint/2015/09/main" Requires="p159">
+      <p:transition spd="med">
+        <p159:morph option="byObject"/>
+      </p:transition>
+    </mc:Choice>
+    <mc:Fallback>
+      <p:transition spd="med">
+        <p:fade/>
+      </p:transition>
+    </mc:Fallback>
+  </mc:AlternateContent>
 </p:sld>
 </file>
 
@@ -11500,9 +11599,18 @@
   <p:clrMapOvr>
     <a:masterClrMapping/>
   </p:clrMapOvr>
-  <p:transition>
-    <p:fade/>
-  </p:transition>
+  <mc:AlternateContent xmlns:mc="http://schemas.openxmlformats.org/markup-compatibility/2006">
+    <mc:Choice xmlns:p159="http://schemas.microsoft.com/office/powerpoint/2015/09/main" Requires="p159">
+      <p:transition spd="med">
+        <p159:morph option="byObject"/>
+      </p:transition>
+    </mc:Choice>
+    <mc:Fallback>
+      <p:transition spd="med">
+        <p:fade/>
+      </p:transition>
+    </mc:Fallback>
+  </mc:AlternateContent>
 </p:sld>
 </file>
 
@@ -13103,9 +13211,18 @@
   <p:clrMapOvr>
     <a:masterClrMapping/>
   </p:clrMapOvr>
-  <p:transition>
-    <p:fade/>
-  </p:transition>
+  <mc:AlternateContent xmlns:mc="http://schemas.openxmlformats.org/markup-compatibility/2006">
+    <mc:Choice xmlns:p159="http://schemas.microsoft.com/office/powerpoint/2015/09/main" Requires="p159">
+      <p:transition spd="med">
+        <p159:morph option="byObject"/>
+      </p:transition>
+    </mc:Choice>
+    <mc:Fallback>
+      <p:transition spd="med">
+        <p:fade/>
+      </p:transition>
+    </mc:Fallback>
+  </mc:AlternateContent>
 </p:sld>
 </file>
 
@@ -13827,9 +13944,18 @@
   <p:clrMapOvr>
     <a:masterClrMapping/>
   </p:clrMapOvr>
-  <p:transition>
-    <p:fade/>
-  </p:transition>
+  <mc:AlternateContent xmlns:mc="http://schemas.openxmlformats.org/markup-compatibility/2006">
+    <mc:Choice xmlns:p159="http://schemas.microsoft.com/office/powerpoint/2015/09/main" Requires="p159">
+      <p:transition spd="med">
+        <p159:morph option="byObject"/>
+      </p:transition>
+    </mc:Choice>
+    <mc:Fallback>
+      <p:transition spd="med">
+        <p:fade/>
+      </p:transition>
+    </mc:Fallback>
+  </mc:AlternateContent>
 </p:sld>
 </file>
 
@@ -15000,9 +15126,18 @@
   <p:clrMapOvr>
     <a:masterClrMapping/>
   </p:clrMapOvr>
-  <p:transition>
-    <p:fade/>
-  </p:transition>
+  <mc:AlternateContent xmlns:mc="http://schemas.openxmlformats.org/markup-compatibility/2006">
+    <mc:Choice xmlns:p159="http://schemas.microsoft.com/office/powerpoint/2015/09/main" Requires="p159">
+      <p:transition spd="med">
+        <p159:morph option="byObject"/>
+      </p:transition>
+    </mc:Choice>
+    <mc:Fallback>
+      <p:transition spd="med">
+        <p:fade/>
+      </p:transition>
+    </mc:Fallback>
+  </mc:AlternateContent>
 </p:sld>
 </file>
 
@@ -15587,9 +15722,18 @@
   <p:clrMapOvr>
     <a:masterClrMapping/>
   </p:clrMapOvr>
-  <p:transition>
-    <p:fade/>
-  </p:transition>
+  <mc:AlternateContent xmlns:mc="http://schemas.openxmlformats.org/markup-compatibility/2006">
+    <mc:Choice xmlns:p159="http://schemas.microsoft.com/office/powerpoint/2015/09/main" Requires="p159">
+      <p:transition spd="med">
+        <p159:morph option="byObject"/>
+      </p:transition>
+    </mc:Choice>
+    <mc:Fallback>
+      <p:transition spd="med">
+        <p:fade/>
+      </p:transition>
+    </mc:Fallback>
+  </mc:AlternateContent>
 </p:sld>
 </file>
 
@@ -17154,9 +17298,18 @@
   <p:clrMapOvr>
     <a:masterClrMapping/>
   </p:clrMapOvr>
-  <p:transition>
-    <p:fade/>
-  </p:transition>
+  <mc:AlternateContent xmlns:mc="http://schemas.openxmlformats.org/markup-compatibility/2006">
+    <mc:Choice xmlns:p159="http://schemas.microsoft.com/office/powerpoint/2015/09/main" Requires="p159">
+      <p:transition spd="med">
+        <p159:morph option="byObject"/>
+      </p:transition>
+    </mc:Choice>
+    <mc:Fallback>
+      <p:transition spd="med">
+        <p:fade/>
+      </p:transition>
+    </mc:Fallback>
+  </mc:AlternateContent>
 </p:sld>
 </file>
 
@@ -19452,9 +19605,18 @@
   <p:clrMapOvr>
     <a:masterClrMapping/>
   </p:clrMapOvr>
-  <p:transition>
-    <p:fade/>
-  </p:transition>
+  <mc:AlternateContent xmlns:mc="http://schemas.openxmlformats.org/markup-compatibility/2006">
+    <mc:Choice xmlns:p159="http://schemas.microsoft.com/office/powerpoint/2015/09/main" Requires="p159">
+      <p:transition spd="med">
+        <p159:morph option="byObject"/>
+      </p:transition>
+    </mc:Choice>
+    <mc:Fallback>
+      <p:transition spd="med">
+        <p:fade/>
+      </p:transition>
+    </mc:Fallback>
+  </mc:AlternateContent>
 </p:sld>
 </file>
 
@@ -20592,9 +20754,18 @@
   <p:clrMapOvr>
     <a:masterClrMapping/>
   </p:clrMapOvr>
-  <p:transition>
-    <p:fade/>
-  </p:transition>
+  <mc:AlternateContent xmlns:mc="http://schemas.openxmlformats.org/markup-compatibility/2006">
+    <mc:Choice xmlns:p159="http://schemas.microsoft.com/office/powerpoint/2015/09/main" Requires="p159">
+      <p:transition spd="med">
+        <p159:morph option="byObject"/>
+      </p:transition>
+    </mc:Choice>
+    <mc:Fallback>
+      <p:transition spd="med">
+        <p:fade/>
+      </p:transition>
+    </mc:Fallback>
+  </mc:AlternateContent>
 </p:sld>
 </file>
 
@@ -21179,9 +21350,18 @@
   <p:clrMapOvr>
     <a:masterClrMapping/>
   </p:clrMapOvr>
-  <p:transition>
-    <p:fade/>
-  </p:transition>
+  <mc:AlternateContent xmlns:mc="http://schemas.openxmlformats.org/markup-compatibility/2006">
+    <mc:Choice xmlns:p159="http://schemas.microsoft.com/office/powerpoint/2015/09/main" Requires="p159">
+      <p:transition spd="med">
+        <p159:morph option="byObject"/>
+      </p:transition>
+    </mc:Choice>
+    <mc:Fallback>
+      <p:transition spd="med">
+        <p:fade/>
+      </p:transition>
+    </mc:Fallback>
+  </mc:AlternateContent>
 </p:sld>
 </file>
 
@@ -23081,9 +23261,18 @@
   <p:clrMapOvr>
     <a:masterClrMapping/>
   </p:clrMapOvr>
-  <p:transition>
-    <p:fade/>
-  </p:transition>
+  <mc:AlternateContent xmlns:mc="http://schemas.openxmlformats.org/markup-compatibility/2006">
+    <mc:Choice xmlns:p159="http://schemas.microsoft.com/office/powerpoint/2015/09/main" Requires="p159">
+      <p:transition spd="med">
+        <p159:morph option="byObject"/>
+      </p:transition>
+    </mc:Choice>
+    <mc:Fallback>
+      <p:transition spd="med">
+        <p:fade/>
+      </p:transition>
+    </mc:Fallback>
+  </mc:AlternateContent>
 </p:sld>
 </file>
 
@@ -23668,9 +23857,18 @@
   <p:clrMapOvr>
     <a:masterClrMapping/>
   </p:clrMapOvr>
-  <p:transition>
-    <p:fade/>
-  </p:transition>
+  <mc:AlternateContent xmlns:mc="http://schemas.openxmlformats.org/markup-compatibility/2006">
+    <mc:Choice xmlns:p159="http://schemas.microsoft.com/office/powerpoint/2015/09/main" Requires="p159">
+      <p:transition spd="med">
+        <p159:morph option="byObject"/>
+      </p:transition>
+    </mc:Choice>
+    <mc:Fallback>
+      <p:transition spd="med">
+        <p:fade/>
+      </p:transition>
+    </mc:Fallback>
+  </mc:AlternateContent>
 </p:sld>
 </file>
 
